--- a/drowsiness_detection.pptx
+++ b/drowsiness_detection.pptx
@@ -1812,7 +1812,7 @@
           <a:p>
             <a:fld id="{49E19D85-684C-4CBD-B577-C318FA43788A}" type="datetimeFigureOut">
               <a:rPr lang="en-US" smtClean="0"/>
-              <a:t>7/3/2026</a:t>
+              <a:t>7/8/2026</a:t>
             </a:fld>
             <a:endParaRPr lang="en-US"/>
           </a:p>
@@ -2362,104 +2362,6 @@
           </a:ln>
         </p:spPr>
       </p:sp>
-      <p:sp>
-        <p:nvSpPr>
-          <p:cNvPr id="7" name="Text 5"/>
-          <p:cNvSpPr/>
-          <p:nvPr/>
-        </p:nvSpPr>
-        <p:spPr>
-          <a:xfrm>
-            <a:off x="7544864" y="4196671"/>
-            <a:ext cx="1450281" cy="822960"/>
-          </a:xfrm>
-          <a:prstGeom prst="rect">
-            <a:avLst/>
-          </a:prstGeom>
-          <a:noFill/>
-          <a:ln/>
-        </p:spPr>
-        <p:txBody>
-          <a:bodyPr wrap="square" lIns="0" tIns="0" rIns="0" bIns="0" rtlCol="0" anchor="ctr"/>
-          <a:lstStyle/>
-          <a:p>
-            <a:pPr marL="0" indent="0" algn="r">
-              <a:buNone/>
-            </a:pPr>
-            <a:r>
-              <a:rPr lang="en-US" sz="1300" b="1" dirty="0">
-                <a:solidFill>
-                  <a:schemeClr val="bg1"/>
-                </a:solidFill>
-                <a:ea typeface="Tahoma" panose="020B0604030504040204" pitchFamily="34" charset="0"/>
-                <a:cs typeface="Tahoma" panose="020B0604030504040204" pitchFamily="34" charset="0"/>
-              </a:rPr>
-              <a:t>PRESENTED BY:</a:t>
-            </a:r>
-            <a:br>
-              <a:rPr lang="en-US" sz="1300" b="1" dirty="0">
-                <a:solidFill>
-                  <a:schemeClr val="bg1"/>
-                </a:solidFill>
-                <a:ea typeface="Tahoma" panose="020B0604030504040204" pitchFamily="34" charset="0"/>
-                <a:cs typeface="Tahoma" panose="020B0604030504040204" pitchFamily="34" charset="0"/>
-              </a:rPr>
-            </a:br>
-            <a:r>
-              <a:rPr lang="en-US" sz="1300" b="1" dirty="0">
-                <a:solidFill>
-                  <a:schemeClr val="bg1"/>
-                </a:solidFill>
-                <a:ea typeface="Tahoma" panose="020B0604030504040204" pitchFamily="34" charset="0"/>
-                <a:cs typeface="Tahoma" panose="020B0604030504040204" pitchFamily="34" charset="0"/>
-              </a:rPr>
-              <a:t>ISHA NABEEL</a:t>
-            </a:r>
-          </a:p>
-          <a:p>
-            <a:pPr marL="0" indent="0" algn="r">
-              <a:buNone/>
-            </a:pPr>
-            <a:r>
-              <a:rPr lang="en-US" sz="1300" b="1" dirty="0">
-                <a:solidFill>
-                  <a:schemeClr val="bg1"/>
-                </a:solidFill>
-                <a:ea typeface="Tahoma" panose="020B0604030504040204" pitchFamily="34" charset="0"/>
-                <a:cs typeface="Tahoma" panose="020B0604030504040204" pitchFamily="34" charset="0"/>
-              </a:rPr>
-              <a:t>EISHAL WAQAS</a:t>
-            </a:r>
-          </a:p>
-          <a:p>
-            <a:pPr marL="0" indent="0" algn="r">
-              <a:buNone/>
-            </a:pPr>
-            <a:r>
-              <a:rPr lang="en-US" sz="1300" b="1" dirty="0">
-                <a:solidFill>
-                  <a:schemeClr val="bg1"/>
-                </a:solidFill>
-                <a:ea typeface="Tahoma" panose="020B0604030504040204" pitchFamily="34" charset="0"/>
-                <a:cs typeface="Tahoma" panose="020B0604030504040204" pitchFamily="34" charset="0"/>
-              </a:rPr>
-              <a:t>AIMA ANJUM</a:t>
-            </a:r>
-          </a:p>
-          <a:p>
-            <a:pPr marL="0" indent="0" algn="r">
-              <a:buNone/>
-            </a:pPr>
-            <a:endParaRPr lang="en-US" sz="1300" b="1" dirty="0">
-              <a:solidFill>
-                <a:schemeClr val="bg1"/>
-              </a:solidFill>
-              <a:ea typeface="Tahoma" panose="020B0604030504040204" pitchFamily="34" charset="0"/>
-              <a:cs typeface="Tahoma" panose="020B0604030504040204" pitchFamily="34" charset="0"/>
-            </a:endParaRPr>
-          </a:p>
-        </p:txBody>
-      </p:sp>
     </p:spTree>
   </p:cSld>
   <p:clrMapOvr>
@@ -11417,13 +11319,13 @@
   <p:clrMapOvr>
     <a:masterClrMapping/>
   </p:clrMapOvr>
-  <mc:AlternateContent xmlns:mc="http://schemas.openxmlformats.org/markup-compatibility/2006">
-    <mc:Choice xmlns:p14="http://schemas.microsoft.com/office/powerpoint/2010/main" Requires="p14">
+  <mc:AlternateContent xmlns:mc="http://schemas.openxmlformats.org/markup-compatibility/2006" xmlns:p14="http://schemas.microsoft.com/office/powerpoint/2010/main">
+    <mc:Choice Requires="p14">
       <p:transition spd="slow" p14:dur="1600">
         <p14:prism isContent="1" isInverted="1"/>
       </p:transition>
     </mc:Choice>
-    <mc:Fallback>
+    <mc:Fallback xmlns="">
       <p:transition spd="slow">
         <p:fade/>
       </p:transition>
